--- a/education/vibe-coding-training/03_AI_Agent_활용을 위한 개념.pptx
+++ b/education/vibe-coding-training/03_AI_Agent_활용을 위한 개념.pptx
@@ -19828,15 +19828,22 @@
                   <a:srgbClr val="C8DCFC"/>
                 </a:solidFill>
               </a:rPr>
-              <a:t>부품 이름과 사용법을 외우는 게 아니라, </a:t>
-            </a:r>
+              <a:t>구성 요소들의 이름과 사용법을 외우는 게 아니라, </a:t>
+            </a:r>
+            <a:br>
+              <a:rPr lang="en-US" altLang="ko-KR" sz="1600" dirty="0">
+                <a:solidFill>
+                  <a:srgbClr val="C8DCFC"/>
+                </a:solidFill>
+              </a:rPr>
+            </a:br>
             <a:r>
               <a:rPr lang="ko-KR" altLang="en-US" sz="1600" b="1" dirty="0">
                 <a:solidFill>
                   <a:srgbClr val="34D399"/>
                 </a:solidFill>
               </a:rPr>
-              <a:t>.md 문서를 쓰는 감각</a:t>
+              <a:t>.md 문서를 쓰고 작성하는 질의 방식 </a:t>
             </a:r>
             <a:r>
               <a:rPr lang="ko-KR" altLang="en-US" sz="1600" dirty="0">
@@ -19844,7 +19851,7 @@
                   <a:srgbClr val="C8DCFC"/>
                 </a:solidFill>
               </a:rPr>
-              <a:t>을 익힙니다.</a:t>
+              <a:t>을 학습한다.</a:t>
             </a:r>
             <a:endParaRPr lang="en-US" sz="1600" dirty="0"/>
           </a:p>
@@ -22102,7 +22109,29 @@
                 <a:ea typeface="Arial Black" pitchFamily="34" charset="-122"/>
                 <a:cs typeface="Arial Black" pitchFamily="34" charset="-120"/>
               </a:rPr>
-              <a:t>AI Docs — Context 실전 예시 (CLAUDE.md)</a:t>
+              <a:t>AI Docs — Context 실전 </a:t>
+            </a:r>
+            <a:r>
+              <a:rPr lang="en-US" sz="2600" b="1" dirty="0" err="1">
+                <a:solidFill>
+                  <a:srgbClr val="1E2761"/>
+                </a:solidFill>
+                <a:latin typeface="Arial Black" pitchFamily="34" charset="0"/>
+                <a:ea typeface="Arial Black" pitchFamily="34" charset="-122"/>
+                <a:cs typeface="Arial Black" pitchFamily="34" charset="-120"/>
+              </a:rPr>
+              <a:t>예시</a:t>
+            </a:r>
+            <a:r>
+              <a:rPr lang="en-US" sz="2600" b="1" dirty="0">
+                <a:solidFill>
+                  <a:srgbClr val="1E2761"/>
+                </a:solidFill>
+                <a:latin typeface="Arial Black" pitchFamily="34" charset="0"/>
+                <a:ea typeface="Arial Black" pitchFamily="34" charset="-122"/>
+                <a:cs typeface="Arial Black" pitchFamily="34" charset="-120"/>
+              </a:rPr>
+              <a:t> (AGENTS.md)</a:t>
             </a:r>
             <a:endParaRPr lang="en-US" sz="2600" dirty="0"/>
           </a:p>
@@ -22163,7 +22192,7 @@
                   <a:srgbClr val="34D399"/>
                 </a:solidFill>
               </a:rPr>
-              <a:t>📄  CLAUDE.md</a:t>
+              <a:t>📄  AGENTS.md</a:t>
             </a:r>
             <a:endParaRPr lang="en-US" sz="1100" dirty="0"/>
           </a:p>
